--- a/PPTs/Ch4_ARM_Arithmetic_Logic_Exercises.pptx
+++ b/PPTs/Ch4_ARM_Arithmetic_Logic_Exercises.pptx
@@ -320,7 +320,7 @@
             <a:fld id="{3AC3A17A-95E8-4381-B66B-5D6DE2B3048A}" type="datetimeFigureOut">
               <a:rPr lang="en-US" smtClean="0"/>
               <a:pPr/>
-              <a:t>2/26/2026</a:t>
+              <a:t>10/7/2026</a:t>
             </a:fld>
             <a:endParaRPr lang="en-US"/>
           </a:p>
@@ -1056,7 +1056,7 @@
                             <a:solidFill>
                               <a:prstClr val="black"/>
                             </a:solidFill>
-                            <a:latin typeface="Cambria Math" panose="02040503050406030204" pitchFamily="18" charset="0"/>
+                            <a:latin typeface="Cambria Math"/>
                           </a:rPr>
                         </m:ctrlPr>
                       </m:sSupPr>
@@ -1088,16 +1088,7 @@
                             </a:solidFill>
                             <a:latin typeface="Cambria Math" panose="02040503050406030204" pitchFamily="18" charset="0"/>
                           </a:rPr>
-                          <m:t>−</m:t>
-                        </m:r>
-                        <m:r>
-                          <a:rPr lang="en-US" sz="2800" b="0" i="1" smtClean="0">
-                            <a:solidFill>
-                              <a:prstClr val="black"/>
-                            </a:solidFill>
-                            <a:latin typeface="Cambria Math" panose="02040503050406030204" pitchFamily="18" charset="0"/>
-                          </a:rPr>
-                          <m:t>1</m:t>
+                          <m:t>−1</m:t>
                         </m:r>
                       </m:sup>
                     </m:sSup>
@@ -1108,16 +1099,7 @@
                         </a:solidFill>
                         <a:latin typeface="Cambria Math"/>
                       </a:rPr>
-                      <m:t>−</m:t>
-                    </m:r>
-                    <m:r>
-                      <a:rPr lang="en-US" sz="2800" i="1">
-                        <a:solidFill>
-                          <a:prstClr val="black"/>
-                        </a:solidFill>
-                        <a:latin typeface="Cambria Math"/>
-                      </a:rPr>
-                      <m:t>1</m:t>
+                      <m:t>−1</m:t>
                     </m:r>
                   </m:oMath>
                 </a14:m>
@@ -1166,7 +1148,7 @@
                     <m:sSup>
                       <m:sSupPr>
                         <m:ctrlPr>
-                          <a:rPr lang="en-US" sz="2800" i="1">
+                          <a:rPr lang="en-US" sz="2800" b="0" i="1" smtClean="0">
                             <a:solidFill>
                               <a:prstClr val="black"/>
                             </a:solidFill>
@@ -1211,16 +1193,7 @@
                             </a:solidFill>
                             <a:latin typeface="Cambria Math" panose="02040503050406030204" pitchFamily="18" charset="0"/>
                           </a:rPr>
-                          <m:t>−</m:t>
-                        </m:r>
-                        <m:r>
-                          <a:rPr lang="en-US" sz="2800" b="0" i="1" smtClean="0">
-                            <a:solidFill>
-                              <a:prstClr val="black"/>
-                            </a:solidFill>
-                            <a:latin typeface="Cambria Math" panose="02040503050406030204" pitchFamily="18" charset="0"/>
-                          </a:rPr>
-                          <m:t>1</m:t>
+                          <m:t>−1</m:t>
                         </m:r>
                       </m:sup>
                     </m:sSup>
@@ -3268,7 +3241,7 @@
             <a:fld id="{966FEA0E-C2DF-4252-97AD-54F2B7E07EAC}" type="datetime1">
               <a:rPr lang="en-US" smtClean="0"/>
               <a:pPr eaLnBrk="1" latinLnBrk="0" hangingPunct="1"/>
-              <a:t>2/26/2026</a:t>
+              <a:t>10/7/2026</a:t>
             </a:fld>
             <a:endParaRPr lang="en-US" sz="1600" dirty="0"/>
           </a:p>
@@ -3629,7 +3602,7 @@
             <a:fld id="{69EF9524-0CAA-4F98-BAC2-CE6B712F5E94}" type="datetime1">
               <a:rPr lang="en-US" smtClean="0"/>
               <a:pPr eaLnBrk="1" latinLnBrk="0" hangingPunct="1"/>
-              <a:t>2/26/2026</a:t>
+              <a:t>10/7/2026</a:t>
             </a:fld>
             <a:endParaRPr lang="en-US"/>
           </a:p>
@@ -3806,7 +3779,7 @@
             <a:fld id="{CB20516D-6F89-4C89-8307-32A716E22875}" type="datetime1">
               <a:rPr lang="en-US" smtClean="0"/>
               <a:pPr eaLnBrk="1" latinLnBrk="0" hangingPunct="1"/>
-              <a:t>2/26/2026</a:t>
+              <a:t>10/7/2026</a:t>
             </a:fld>
             <a:endParaRPr lang="en-US"/>
           </a:p>
@@ -4043,7 +4016,7 @@
             <a:fld id="{0CD88620-7329-4FC3-B65D-4EA691138F1B}" type="datetime1">
               <a:rPr lang="en-US" smtClean="0"/>
               <a:pPr eaLnBrk="1" latinLnBrk="0" hangingPunct="1"/>
-              <a:t>2/26/2026</a:t>
+              <a:t>10/7/2026</a:t>
             </a:fld>
             <a:endParaRPr lang="en-US" dirty="0"/>
           </a:p>
@@ -4314,7 +4287,7 @@
             <a:fld id="{0E46F3A1-5653-427D-9F78-56077401431A}" type="datetime1">
               <a:rPr lang="en-US" smtClean="0"/>
               <a:pPr eaLnBrk="1" latinLnBrk="0" hangingPunct="1"/>
-              <a:t>2/26/2026</a:t>
+              <a:t>10/7/2026</a:t>
             </a:fld>
             <a:endParaRPr lang="en-US" dirty="0"/>
           </a:p>
@@ -4536,7 +4509,7 @@
             <a:fld id="{CB67FC03-415A-45F0-B002-DF181377F7DC}" type="datetime1">
               <a:rPr lang="en-US" smtClean="0"/>
               <a:pPr eaLnBrk="1" latinLnBrk="0" hangingPunct="1"/>
-              <a:t>2/26/2026</a:t>
+              <a:t>10/7/2026</a:t>
             </a:fld>
             <a:endParaRPr lang="en-US"/>
           </a:p>
@@ -4890,7 +4863,7 @@
             <a:fld id="{1B6FC726-A0B4-4FC7-90F5-F17415A5C1A3}" type="datetime1">
               <a:rPr lang="en-US" smtClean="0"/>
               <a:pPr eaLnBrk="1" latinLnBrk="0" hangingPunct="1"/>
-              <a:t>2/26/2026</a:t>
+              <a:t>10/7/2026</a:t>
             </a:fld>
             <a:endParaRPr lang="en-US"/>
           </a:p>
@@ -5124,7 +5097,7 @@
             <a:fld id="{BE217211-C3F9-4892-9CC3-C7105638567D}" type="datetime1">
               <a:rPr lang="en-US" smtClean="0"/>
               <a:pPr eaLnBrk="1" latinLnBrk="0" hangingPunct="1"/>
-              <a:t>2/26/2026</a:t>
+              <a:t>10/7/2026</a:t>
             </a:fld>
             <a:endParaRPr lang="en-US"/>
           </a:p>
@@ -5267,7 +5240,7 @@
             <a:fld id="{BA713E6A-6B26-4373-A75B-EF395DC64F9E}" type="datetime1">
               <a:rPr lang="en-US" smtClean="0"/>
               <a:pPr eaLnBrk="1" latinLnBrk="0" hangingPunct="1"/>
-              <a:t>2/26/2026</a:t>
+              <a:t>10/7/2026</a:t>
             </a:fld>
             <a:endParaRPr lang="en-US"/>
           </a:p>
@@ -5546,7 +5519,7 @@
             <a:fld id="{57EB41EF-4260-415A-8DD6-FEDCC46E7EFC}" type="datetime1">
               <a:rPr lang="en-US" smtClean="0"/>
               <a:pPr eaLnBrk="1" latinLnBrk="0" hangingPunct="1"/>
-              <a:t>2/26/2026</a:t>
+              <a:t>10/7/2026</a:t>
             </a:fld>
             <a:endParaRPr lang="en-US"/>
           </a:p>
@@ -5955,7 +5928,7 @@
             <a:fld id="{6BDA80A0-06CC-4492-94A0-E8516751045E}" type="datetime1">
               <a:rPr lang="en-US" smtClean="0"/>
               <a:pPr eaLnBrk="1" latinLnBrk="0" hangingPunct="1"/>
-              <a:t>2/26/2026</a:t>
+              <a:t>10/7/2026</a:t>
             </a:fld>
             <a:endParaRPr lang="en-US"/>
           </a:p>
@@ -6294,7 +6267,7 @@
             <a:fld id="{A25B5B4B-57EE-495D-8E74-A657CFD8BB6C}" type="datetime1">
               <a:rPr lang="en-US" smtClean="0"/>
               <a:pPr eaLnBrk="1" latinLnBrk="0" hangingPunct="1"/>
-              <a:t>2/26/2026</a:t>
+              <a:t>10/7/2026</a:t>
             </a:fld>
             <a:endParaRPr lang="en-US" sz="1400" dirty="0">
               <a:solidFill>
@@ -6882,7 +6855,7 @@
           <a:p>
             <a:r>
               <a:rPr lang="en-US" dirty="0"/>
-              <a:t>Fall 2025</a:t>
+              <a:t>Fall 2026</a:t>
             </a:r>
           </a:p>
         </p:txBody>
@@ -7191,7 +7164,7 @@
           <a:p>
             <a:r>
               <a:rPr lang="pt-BR" dirty="0"/>
-              <a:t>Assuimg 32-bit registers:</a:t>
+              <a:t>Assuming 32-bit registers:</a:t>
             </a:r>
           </a:p>
           <a:p>
@@ -7211,7 +7184,7 @@
             <a:pPr lvl="1"/>
             <a:r>
               <a:rPr lang="pt-BR" dirty="0"/>
-              <a:t>MOV r0, r0, LSL 7</a:t>
+              <a:t>MOV r0, r0, LSL #7</a:t>
             </a:r>
           </a:p>
           <a:p>
@@ -7231,7 +7204,7 @@
             <a:pPr lvl="1"/>
             <a:r>
               <a:rPr lang="pt-BR" dirty="0"/>
-              <a:t>MOV r0, r0, LSR 2</a:t>
+              <a:t>MOV r0, r0, LSR #2</a:t>
             </a:r>
           </a:p>
           <a:p>
@@ -7242,7 +7215,7 @@
             </a:r>
             <a:r>
               <a:rPr lang="pt-BR"/>
-              <a:t>, ASR 2</a:t>
+              <a:t>, ASR #2</a:t>
             </a:r>
             <a:endParaRPr lang="pt-BR" dirty="0"/>
           </a:p>
@@ -7267,7 +7240,7 @@
             <a:pPr lvl="1"/>
             <a:r>
               <a:rPr lang="pt-BR" dirty="0"/>
-              <a:t>MOV r0, r0, LSR 2</a:t>
+              <a:t>MOV r0, r0, LSR #2</a:t>
             </a:r>
             <a:endParaRPr lang="en-US" dirty="0"/>
           </a:p>
@@ -7275,7 +7248,7 @@
             <a:pPr lvl="1"/>
             <a:r>
               <a:rPr lang="pt-BR" dirty="0"/>
-              <a:t>Or: MOV r0, r0, ASR 2</a:t>
+              <a:t>Or: MOV r0, r0, ASR #2</a:t>
             </a:r>
           </a:p>
           <a:p>
@@ -7295,7 +7268,7 @@
             <a:pPr lvl="1"/>
             <a:r>
               <a:rPr lang="pt-BR" dirty="0"/>
-              <a:t>MOV r0, r0, ROR 2</a:t>
+              <a:t>MOV r0, r0, ROR #2</a:t>
             </a:r>
             <a:endParaRPr lang="en-US" dirty="0"/>
           </a:p>
@@ -7729,21 +7702,21 @@
             <a:pPr lvl="1"/>
             <a:r>
               <a:rPr lang="pt-BR" dirty="0"/>
-              <a:t>MOV R2, R1, LSLS #4</a:t>
+              <a:t>MOVS R2, R1, LSL #4</a:t>
             </a:r>
           </a:p>
           <a:p>
             <a:pPr lvl="1"/>
             <a:r>
               <a:rPr lang="pt-BR" dirty="0"/>
-              <a:t>MOV R3, R1, LSLS #8</a:t>
+              <a:t>MOVS R3, R1, LSL #8</a:t>
             </a:r>
           </a:p>
           <a:p>
             <a:pPr lvl="1"/>
             <a:r>
               <a:rPr lang="pt-BR" dirty="0"/>
-              <a:t>MOV R4, R1, LSLS #16</a:t>
+              <a:t>MOVS R4, R1, LSL #16</a:t>
             </a:r>
           </a:p>
         </p:txBody>
@@ -8214,7 +8187,7 @@
             </a:r>
             <a:r>
               <a:rPr lang="pt-BR" dirty="0"/>
-              <a:t>-</a:t>
+              <a:t>.</a:t>
             </a:r>
           </a:p>
           <a:p>
@@ -8228,28 +8201,28 @@
             <a:pPr lvl="1"/>
             <a:r>
               <a:rPr lang="pt-BR" dirty="0"/>
-              <a:t>MOV R2, R1, LSRS #4</a:t>
+              <a:t>MOVS R2, R1, LSR #4</a:t>
             </a:r>
           </a:p>
           <a:p>
             <a:pPr lvl="1"/>
             <a:r>
               <a:rPr lang="pt-BR" dirty="0"/>
-              <a:t>MOV R3, R1, LSRS #8</a:t>
+              <a:t>MOVS R3, R1, LSR #8</a:t>
             </a:r>
           </a:p>
           <a:p>
             <a:pPr lvl="1"/>
             <a:r>
               <a:rPr lang="pt-BR" dirty="0"/>
-              <a:t>MOV R4, R1, LSRS #16</a:t>
+              <a:t>MOVS R4, R1, LSR #16</a:t>
             </a:r>
           </a:p>
           <a:p>
             <a:pPr lvl="1"/>
             <a:r>
               <a:rPr lang="pt-BR" dirty="0"/>
-              <a:t>MOV R5, R1, </a:t>
+              <a:t>MOVS R5, R1, </a:t>
             </a:r>
             <a:r>
               <a:rPr lang="en-US" altLang="zh-CN" dirty="0"/>
@@ -8257,21 +8230,21 @@
             </a:r>
             <a:r>
               <a:rPr lang="pt-BR" dirty="0"/>
-              <a:t>SRS #4</a:t>
+              <a:t>SR #4</a:t>
             </a:r>
           </a:p>
           <a:p>
             <a:pPr lvl="1"/>
             <a:r>
               <a:rPr lang="pt-BR" dirty="0"/>
-              <a:t>MOV R6, R1, ASRS #8</a:t>
+              <a:t>MOVS R6, R1, ASR #8</a:t>
             </a:r>
           </a:p>
           <a:p>
             <a:pPr lvl="1"/>
             <a:r>
               <a:rPr lang="pt-BR" dirty="0"/>
-              <a:t>MOV R7, R1, ASRS #16</a:t>
+              <a:t>MOVS R7, R1, ASR #16</a:t>
             </a:r>
           </a:p>
         </p:txBody>
@@ -8422,8 +8395,9 @@
             <a:pPr lvl="1"/>
             <a:r>
               <a:rPr lang="en-US"/>
-              <a:t>16384</a:t>
-            </a:r>
+              <a:t>1025</a:t>
+            </a:r>
+            <a:endParaRPr lang="en-US" dirty="0"/>
           </a:p>
           <a:p>
             <a:endParaRPr lang="en-US" dirty="0"/>
@@ -8678,7 +8652,7 @@
           <a:p>
             <a:r>
               <a:rPr lang="en-US" dirty="0"/>
-              <a:t>Based on the program that counts 1’s, modify it to count the number of zeros a 32-bit register r0. </a:t>
+              <a:t>Based on the program that counts 1’s, modify it to count the number of zeros in a 32-bit register r0. </a:t>
             </a:r>
           </a:p>
         </p:txBody>
@@ -8822,7 +8796,7 @@
                     <m:sSup>
                       <m:sSupPr>
                         <m:ctrlPr>
-                          <a:rPr lang="ar-AE" i="1">
+                          <a:rPr lang="ar-AE">
                             <a:latin typeface="Cambria Math" panose="02040503050406030204" pitchFamily="18" charset="0"/>
                           </a:rPr>
                         </m:ctrlPr>
@@ -8886,7 +8860,7 @@
                     <m:sSup>
                       <m:sSupPr>
                         <m:ctrlPr>
-                          <a:rPr lang="ar-AE" i="1">
+                          <a:rPr lang="ar-AE">
                             <a:latin typeface="Cambria Math" panose="02040503050406030204" pitchFamily="18" charset="0"/>
                           </a:rPr>
                         </m:ctrlPr>
@@ -8950,7 +8924,7 @@
                     <m:sSup>
                       <m:sSupPr>
                         <m:ctrlPr>
-                          <a:rPr lang="ar-AE" i="1">
+                          <a:rPr lang="ar-AE">
                             <a:latin typeface="Cambria Math" panose="02040503050406030204" pitchFamily="18" charset="0"/>
                           </a:rPr>
                         </m:ctrlPr>
@@ -9345,7 +9319,7 @@
                 <a:latin typeface="Consolas" panose="020B0609020204030204" pitchFamily="49" charset="0"/>
                 <a:cs typeface="Consolas" panose="020B0609020204030204" pitchFamily="49" charset="0"/>
               </a:rPr>
-              <a:t>LDR r0, =0xFFFFFFF00</a:t>
+              <a:t>LDR r0, =0xFFFFFF00</a:t>
             </a:r>
           </a:p>
           <a:p>
@@ -9542,7 +9516,7 @@
                 <a:latin typeface="Consolas" panose="020B0609020204030204" pitchFamily="49" charset="0"/>
                 <a:cs typeface="Consolas" panose="020B0609020204030204" pitchFamily="49" charset="0"/>
               </a:rPr>
-              <a:t>LDR r0, =0xFFFFFFF00</a:t>
+              <a:t>LDR r0, =0xFFFFFF00</a:t>
             </a:r>
           </a:p>
           <a:p>
@@ -10077,42 +10051,42 @@
             <a:pPr lvl="1"/>
             <a:r>
               <a:rPr lang="pt-BR" dirty="0"/>
-              <a:t>ADD r3, r0, r2</a:t>
+              <a:t>(a) ADD r3, r0, r2</a:t>
             </a:r>
           </a:p>
           <a:p>
             <a:pPr lvl="1"/>
             <a:r>
               <a:rPr lang="pt-BR" dirty="0"/>
-              <a:t>SUBS r3, r0, r0</a:t>
+              <a:t>(b) ADDS r3, r0, r2</a:t>
             </a:r>
           </a:p>
           <a:p>
             <a:pPr lvl="1"/>
             <a:r>
               <a:rPr lang="pt-BR" dirty="0"/>
-              <a:t>ADDS r3, r0, r2</a:t>
+              <a:t>(c) SUBS r3, r0, r0</a:t>
             </a:r>
           </a:p>
           <a:p>
             <a:pPr lvl="1"/>
             <a:r>
               <a:rPr lang="pt-BR" dirty="0"/>
-              <a:t>LSL r3, r0, #1</a:t>
+              <a:t>(d) LSL r3, r0, #1</a:t>
             </a:r>
           </a:p>
           <a:p>
             <a:pPr lvl="1"/>
             <a:r>
               <a:rPr lang="pt-BR" dirty="0"/>
-              <a:t>LSRS r3, r1, #1</a:t>
+              <a:t>(e) LSRS r3, r1, #1</a:t>
             </a:r>
           </a:p>
           <a:p>
             <a:pPr lvl="1"/>
             <a:r>
               <a:rPr lang="pt-BR" dirty="0"/>
-              <a:t>ANDS r3, r0, r2</a:t>
+              <a:t>(f) ANDS r3, r0, r2</a:t>
             </a:r>
             <a:endParaRPr lang="en-US" dirty="0"/>
           </a:p>
@@ -11941,7 +11915,7 @@
           <a:p>
             <a:r>
               <a:rPr lang="pt-BR" dirty="0"/>
-              <a:t>Compute register values after each instruction</a:t>
+              <a:t>Compute 32-bit register values after each instruction</a:t>
             </a:r>
           </a:p>
           <a:p>
